--- a/knf/decks/d4p1.pptx
+++ b/knf/decks/d4p1.pptx
@@ -5045,7 +5045,7 @@
                 <a:ea typeface="Pretendard"/>
                 <a:cs typeface="Pretendard"/>
               </a:rPr>
-              <a:t>이 45분에서 꼭 가져갈 것</a:t>
+              <a:t>이 50분에서 꼭 가져갈 것</a:t>
             </a:r>
           </a:p>
         </p:txBody>
@@ -6768,7 +6768,7 @@
                 <a:ea typeface="Pretendard"/>
                 <a:cs typeface="Pretendard"/>
               </a:rPr>
-              <a:t>45분 뒤에는</a:t>
+              <a:t>50분 뒤에는</a:t>
             </a:r>
           </a:p>
         </p:txBody>

--- a/knf/decks/d4p1.pptx
+++ b/knf/decks/d4p1.pptx
@@ -3101,7 +3101,7 @@
       <p:grpSpPr/>
       <p:sp>
         <p:nvSpPr>
-          <p:cNvPr id="2" name="Oval 1"/>
+          <p:cNvPr id="2" name="deckgen:decor"/>
           <p:cNvSpPr/>
           <p:nvPr/>
         </p:nvSpPr>
@@ -3131,7 +3131,7 @@
       </p:sp>
       <p:sp>
         <p:nvSpPr>
-          <p:cNvPr id="3" name="Oval 2"/>
+          <p:cNvPr id="3" name="deckgen:decor"/>
           <p:cNvSpPr/>
           <p:nvPr/>
         </p:nvSpPr>
@@ -3161,7 +3161,7 @@
       </p:sp>
       <p:sp>
         <p:nvSpPr>
-          <p:cNvPr id="4" name="Oval 3"/>
+          <p:cNvPr id="4" name="deckgen:decor"/>
           <p:cNvSpPr/>
           <p:nvPr/>
         </p:nvSpPr>
@@ -3191,7 +3191,7 @@
       </p:sp>
       <p:sp>
         <p:nvSpPr>
-          <p:cNvPr id="5" name="Rectangle 4"/>
+          <p:cNvPr id="5" name="deckgen:decor"/>
           <p:cNvSpPr/>
           <p:nvPr/>
         </p:nvSpPr>
@@ -3221,7 +3221,7 @@
       </p:sp>
       <p:sp>
         <p:nvSpPr>
-          <p:cNvPr id="6" name="Oval 5"/>
+          <p:cNvPr id="6" name="deckgen:decor"/>
           <p:cNvSpPr/>
           <p:nvPr/>
         </p:nvSpPr>
@@ -3251,7 +3251,7 @@
       </p:sp>
       <p:sp>
         <p:nvSpPr>
-          <p:cNvPr id="7" name="Oval 6"/>
+          <p:cNvPr id="7" name="deckgen:decor"/>
           <p:cNvSpPr/>
           <p:nvPr/>
         </p:nvSpPr>
@@ -3281,7 +3281,7 @@
       </p:sp>
       <p:sp>
         <p:nvSpPr>
-          <p:cNvPr id="8" name="Oval 7"/>
+          <p:cNvPr id="8" name="deckgen:decor"/>
           <p:cNvSpPr/>
           <p:nvPr/>
         </p:nvSpPr>
@@ -3311,7 +3311,7 @@
       </p:sp>
       <p:sp>
         <p:nvSpPr>
-          <p:cNvPr id="9" name="Oval 8"/>
+          <p:cNvPr id="9" name="deckgen:decor"/>
           <p:cNvSpPr/>
           <p:nvPr/>
         </p:nvSpPr>
@@ -3341,7 +3341,7 @@
       </p:sp>
       <p:sp>
         <p:nvSpPr>
-          <p:cNvPr id="10" name="Rectangle 9"/>
+          <p:cNvPr id="10" name="deckgen:decor"/>
           <p:cNvSpPr/>
           <p:nvPr/>
         </p:nvSpPr>
@@ -3619,7 +3619,7 @@
       <p:grpSpPr/>
       <p:sp>
         <p:nvSpPr>
-          <p:cNvPr id="2" name="Oval 1"/>
+          <p:cNvPr id="2" name="deckgen:decor"/>
           <p:cNvSpPr/>
           <p:nvPr/>
         </p:nvSpPr>
@@ -3649,7 +3649,7 @@
       </p:sp>
       <p:sp>
         <p:nvSpPr>
-          <p:cNvPr id="3" name="Oval 2"/>
+          <p:cNvPr id="3" name="deckgen:decor"/>
           <p:cNvSpPr/>
           <p:nvPr/>
         </p:nvSpPr>
@@ -3679,7 +3679,7 @@
       </p:sp>
       <p:sp>
         <p:nvSpPr>
-          <p:cNvPr id="4" name="Oval 3"/>
+          <p:cNvPr id="4" name="deckgen:decor"/>
           <p:cNvSpPr/>
           <p:nvPr/>
         </p:nvSpPr>
@@ -4880,7 +4880,7 @@
       <p:grpSpPr/>
       <p:sp>
         <p:nvSpPr>
-          <p:cNvPr id="2" name="Oval 1"/>
+          <p:cNvPr id="2" name="deckgen:decor"/>
           <p:cNvSpPr/>
           <p:nvPr/>
         </p:nvSpPr>
@@ -4910,7 +4910,7 @@
       </p:sp>
       <p:sp>
         <p:nvSpPr>
-          <p:cNvPr id="3" name="Oval 2"/>
+          <p:cNvPr id="3" name="deckgen:decor"/>
           <p:cNvSpPr/>
           <p:nvPr/>
         </p:nvSpPr>
@@ -4940,7 +4940,7 @@
       </p:sp>
       <p:sp>
         <p:nvSpPr>
-          <p:cNvPr id="4" name="Oval 3"/>
+          <p:cNvPr id="4" name="deckgen:decor"/>
           <p:cNvSpPr/>
           <p:nvPr/>
         </p:nvSpPr>
@@ -5796,7 +5796,7 @@
       <p:grpSpPr/>
       <p:sp>
         <p:nvSpPr>
-          <p:cNvPr id="2" name="Oval 1"/>
+          <p:cNvPr id="2" name="deckgen:decor"/>
           <p:cNvSpPr/>
           <p:nvPr/>
         </p:nvSpPr>
@@ -5826,7 +5826,7 @@
       </p:sp>
       <p:sp>
         <p:nvSpPr>
-          <p:cNvPr id="3" name="Oval 2"/>
+          <p:cNvPr id="3" name="deckgen:decor"/>
           <p:cNvSpPr/>
           <p:nvPr/>
         </p:nvSpPr>
@@ -6603,7 +6603,7 @@
       <p:grpSpPr/>
       <p:sp>
         <p:nvSpPr>
-          <p:cNvPr id="2" name="Oval 1"/>
+          <p:cNvPr id="2" name="deckgen:decor"/>
           <p:cNvSpPr/>
           <p:nvPr/>
         </p:nvSpPr>
@@ -6633,7 +6633,7 @@
       </p:sp>
       <p:sp>
         <p:nvSpPr>
-          <p:cNvPr id="3" name="Oval 2"/>
+          <p:cNvPr id="3" name="deckgen:decor"/>
           <p:cNvSpPr/>
           <p:nvPr/>
         </p:nvSpPr>
@@ -6663,7 +6663,7 @@
       </p:sp>
       <p:sp>
         <p:nvSpPr>
-          <p:cNvPr id="4" name="Oval 3"/>
+          <p:cNvPr id="4" name="deckgen:decor"/>
           <p:cNvSpPr/>
           <p:nvPr/>
         </p:nvSpPr>
@@ -7448,7 +7448,7 @@
       <p:grpSpPr/>
       <p:sp>
         <p:nvSpPr>
-          <p:cNvPr id="2" name="Oval 1"/>
+          <p:cNvPr id="2" name="deckgen:decor"/>
           <p:cNvSpPr/>
           <p:nvPr/>
         </p:nvSpPr>
@@ -7478,7 +7478,7 @@
       </p:sp>
       <p:sp>
         <p:nvSpPr>
-          <p:cNvPr id="3" name="Oval 2"/>
+          <p:cNvPr id="3" name="deckgen:decor"/>
           <p:cNvSpPr/>
           <p:nvPr/>
         </p:nvSpPr>
@@ -7508,7 +7508,7 @@
       </p:sp>
       <p:sp>
         <p:nvSpPr>
-          <p:cNvPr id="4" name="Oval 3"/>
+          <p:cNvPr id="4" name="deckgen:decor"/>
           <p:cNvSpPr/>
           <p:nvPr/>
         </p:nvSpPr>
@@ -8431,7 +8431,7 @@
       <p:grpSpPr/>
       <p:sp>
         <p:nvSpPr>
-          <p:cNvPr id="2" name="Oval 1"/>
+          <p:cNvPr id="2" name="deckgen:decor"/>
           <p:cNvSpPr/>
           <p:nvPr/>
         </p:nvSpPr>
@@ -8461,7 +8461,7 @@
       </p:sp>
       <p:sp>
         <p:nvSpPr>
-          <p:cNvPr id="3" name="Oval 2"/>
+          <p:cNvPr id="3" name="deckgen:decor"/>
           <p:cNvSpPr/>
           <p:nvPr/>
         </p:nvSpPr>
@@ -8491,7 +8491,7 @@
       </p:sp>
       <p:sp>
         <p:nvSpPr>
-          <p:cNvPr id="4" name="Oval 3"/>
+          <p:cNvPr id="4" name="deckgen:decor"/>
           <p:cNvSpPr/>
           <p:nvPr/>
         </p:nvSpPr>
@@ -10592,7 +10592,7 @@
       <p:grpSpPr/>
       <p:sp>
         <p:nvSpPr>
-          <p:cNvPr id="2" name="Oval 1"/>
+          <p:cNvPr id="2" name="deckgen:decor"/>
           <p:cNvSpPr/>
           <p:nvPr/>
         </p:nvSpPr>
@@ -10622,7 +10622,7 @@
       </p:sp>
       <p:sp>
         <p:nvSpPr>
-          <p:cNvPr id="3" name="Oval 2"/>
+          <p:cNvPr id="3" name="deckgen:decor"/>
           <p:cNvSpPr/>
           <p:nvPr/>
         </p:nvSpPr>
@@ -10652,7 +10652,7 @@
       </p:sp>
       <p:sp>
         <p:nvSpPr>
-          <p:cNvPr id="4" name="Oval 3"/>
+          <p:cNvPr id="4" name="deckgen:decor"/>
           <p:cNvSpPr/>
           <p:nvPr/>
         </p:nvSpPr>
@@ -11619,7 +11619,7 @@
       <p:grpSpPr/>
       <p:sp>
         <p:nvSpPr>
-          <p:cNvPr id="2" name="Oval 1"/>
+          <p:cNvPr id="2" name="deckgen:decor"/>
           <p:cNvSpPr/>
           <p:nvPr/>
         </p:nvSpPr>
@@ -11649,7 +11649,7 @@
       </p:sp>
       <p:sp>
         <p:nvSpPr>
-          <p:cNvPr id="3" name="Oval 2"/>
+          <p:cNvPr id="3" name="deckgen:decor"/>
           <p:cNvSpPr/>
           <p:nvPr/>
         </p:nvSpPr>
@@ -11679,7 +11679,7 @@
       </p:sp>
       <p:sp>
         <p:nvSpPr>
-          <p:cNvPr id="4" name="Oval 3"/>
+          <p:cNvPr id="4" name="deckgen:decor"/>
           <p:cNvSpPr/>
           <p:nvPr/>
         </p:nvSpPr>
@@ -12680,7 +12680,7 @@
       <p:grpSpPr/>
       <p:sp>
         <p:nvSpPr>
-          <p:cNvPr id="2" name="Oval 1"/>
+          <p:cNvPr id="2" name="deckgen:decor"/>
           <p:cNvSpPr/>
           <p:nvPr/>
         </p:nvSpPr>
@@ -12710,7 +12710,7 @@
       </p:sp>
       <p:sp>
         <p:nvSpPr>
-          <p:cNvPr id="3" name="Oval 2"/>
+          <p:cNvPr id="3" name="deckgen:decor"/>
           <p:cNvSpPr/>
           <p:nvPr/>
         </p:nvSpPr>
@@ -12740,7 +12740,7 @@
       </p:sp>
       <p:sp>
         <p:nvSpPr>
-          <p:cNvPr id="4" name="Oval 3"/>
+          <p:cNvPr id="4" name="deckgen:decor"/>
           <p:cNvSpPr/>
           <p:nvPr/>
         </p:nvSpPr>
@@ -12946,7 +12946,7 @@
       </p:sp>
       <p:sp>
         <p:nvSpPr>
-          <p:cNvPr id="10" name="TextBox 9"/>
+          <p:cNvPr id="10" name="deckgen:ornament"/>
           <p:cNvSpPr txBox="1"/>
           <p:nvPr/>
         </p:nvSpPr>
@@ -13131,7 +13131,7 @@
       </p:sp>
       <p:sp>
         <p:nvSpPr>
-          <p:cNvPr id="14" name="TextBox 13"/>
+          <p:cNvPr id="14" name="deckgen:ornament"/>
           <p:cNvSpPr txBox="1"/>
           <p:nvPr/>
         </p:nvSpPr>
@@ -13316,7 +13316,7 @@
       </p:sp>
       <p:sp>
         <p:nvSpPr>
-          <p:cNvPr id="18" name="TextBox 17"/>
+          <p:cNvPr id="18" name="deckgen:ornament"/>
           <p:cNvSpPr txBox="1"/>
           <p:nvPr/>
         </p:nvSpPr>
@@ -13638,7 +13638,7 @@
       <p:grpSpPr/>
       <p:sp>
         <p:nvSpPr>
-          <p:cNvPr id="2" name="Oval 1"/>
+          <p:cNvPr id="2" name="deckgen:decor"/>
           <p:cNvSpPr/>
           <p:nvPr/>
         </p:nvSpPr>
@@ -13668,7 +13668,7 @@
       </p:sp>
       <p:sp>
         <p:nvSpPr>
-          <p:cNvPr id="3" name="Oval 2"/>
+          <p:cNvPr id="3" name="deckgen:decor"/>
           <p:cNvSpPr/>
           <p:nvPr/>
         </p:nvSpPr>
@@ -13698,7 +13698,7 @@
       </p:sp>
       <p:sp>
         <p:nvSpPr>
-          <p:cNvPr id="4" name="Oval 3"/>
+          <p:cNvPr id="4" name="deckgen:decor"/>
           <p:cNvSpPr/>
           <p:nvPr/>
         </p:nvSpPr>
@@ -14638,7 +14638,7 @@
       <p:grpSpPr/>
       <p:sp>
         <p:nvSpPr>
-          <p:cNvPr id="2" name="Oval 1"/>
+          <p:cNvPr id="2" name="deckgen:decor"/>
           <p:cNvSpPr/>
           <p:nvPr/>
         </p:nvSpPr>
@@ -14668,7 +14668,7 @@
       </p:sp>
       <p:sp>
         <p:nvSpPr>
-          <p:cNvPr id="3" name="Oval 2"/>
+          <p:cNvPr id="3" name="deckgen:decor"/>
           <p:cNvSpPr/>
           <p:nvPr/>
         </p:nvSpPr>
@@ -14698,7 +14698,7 @@
       </p:sp>
       <p:sp>
         <p:nvSpPr>
-          <p:cNvPr id="4" name="Oval 3"/>
+          <p:cNvPr id="4" name="deckgen:decor"/>
           <p:cNvSpPr/>
           <p:nvPr/>
         </p:nvSpPr>
